--- a/plantillas-taller/Plantilla taller · Encuentro 1 · concepto y práctica.pptx
+++ b/plantillas-taller/Plantilla taller · Encuentro 1 · concepto y práctica.pptx
@@ -120,7 +120,7 @@
   <p:extLst>
     <p:ext uri="{521415D9-36F7-43E2-AB2F-B90AF26B5E84}">
       <p14:sectionLst xmlns:p14="http://schemas.microsoft.com/office/powerpoint/2010/main">
-        <p14:section name="Encuentro 1" id="{4498d61c-6e6a-380e-3daa-f07f54a4303a}">
+        <p14:section name="Encuentro 1" id="{aa2fb58d-ee76-6017-3d71-31ca51d85e3a}">
           <p14:sldIdLst>
             <p14:sldId id="256"/>
             <p14:sldId id="257"/>
@@ -3105,8 +3105,8 @@
         </p:nvSpPr>
         <p:spPr>
           <a:xfrm>
-            <a:off x="1143000" y="4434840"/>
-            <a:ext cx="4069080" cy="502920"/>
+            <a:off x="1145286" y="4434840"/>
+            <a:ext cx="4066794" cy="502920"/>
           </a:xfrm>
           <a:prstGeom prst="rect">
             <a:avLst/>
@@ -3858,8 +3858,8 @@
         </p:nvSpPr>
         <p:spPr>
           <a:xfrm>
-            <a:off x="1143000" y="1280160"/>
-            <a:ext cx="5349240" cy="457200"/>
+            <a:off x="1120140" y="1280160"/>
+            <a:ext cx="5372100" cy="457200"/>
           </a:xfrm>
           <a:prstGeom prst="rect">
             <a:avLst/>
@@ -7396,8 +7396,8 @@
         </p:nvSpPr>
         <p:spPr>
           <a:xfrm>
-            <a:off x="7223760" y="1600200"/>
-            <a:ext cx="3977640" cy="457200"/>
+            <a:off x="7200900" y="1600200"/>
+            <a:ext cx="4000500" cy="457200"/>
           </a:xfrm>
           <a:prstGeom prst="rect">
             <a:avLst/>
@@ -13109,8 +13109,8 @@
         </p:nvSpPr>
         <p:spPr>
           <a:xfrm>
-            <a:off x="6675120" y="1874520"/>
-            <a:ext cx="3520440" cy="420624"/>
+            <a:off x="6632143" y="1874520"/>
+            <a:ext cx="3563417" cy="420624"/>
           </a:xfrm>
           <a:prstGeom prst="rect">
             <a:avLst/>
@@ -17283,8 +17283,8 @@
         </p:nvSpPr>
         <p:spPr>
           <a:xfrm>
-            <a:off x="1143000" y="5120640"/>
-            <a:ext cx="7086600" cy="457200"/>
+            <a:off x="1120140" y="5120640"/>
+            <a:ext cx="7109460" cy="457200"/>
           </a:xfrm>
           <a:prstGeom prst="rect">
             <a:avLst/>
